--- a/Python/21_NumPy/Presentation/21_Библиотека_Numpy.pptx
+++ b/Python/21_NumPy/Presentation/21_Библиотека_Numpy.pptx
@@ -234,7 +234,7 @@
           <a:p>
             <a:fld id="{929D4DEE-AA18-4B6A-845C-60AFD9463AA2}" type="datetimeFigureOut">
               <a:rPr lang="ru-RU" smtClean="0"/>
-              <a:t>09.09.2024</a:t>
+              <a:t>01.11.2024</a:t>
             </a:fld>
             <a:endParaRPr lang="ru-RU"/>
           </a:p>
@@ -1911,7 +1911,7 @@
           <a:p>
             <a:fld id="{1D8BD707-D9CF-40AE-B4C6-C98DA3205C09}" type="datetimeFigureOut">
               <a:rPr lang="en-US"/>
-              <a:t>9/9/24</a:t>
+              <a:t>11/1/24</a:t>
             </a:fld>
             <a:endParaRPr lang="en-US"/>
           </a:p>
@@ -2086,7 +2086,7 @@
           <a:p>
             <a:fld id="{1D8BD707-D9CF-40AE-B4C6-C98DA3205C09}" type="datetimeFigureOut">
               <a:rPr lang="en-US"/>
-              <a:t>9/9/24</a:t>
+              <a:t>11/1/24</a:t>
             </a:fld>
             <a:endParaRPr lang="en-US"/>
           </a:p>
@@ -2342,7 +2342,7 @@
           <a:p>
             <a:fld id="{1D8BD707-D9CF-40AE-B4C6-C98DA3205C09}" type="datetimeFigureOut">
               <a:rPr lang="en-US"/>
-              <a:t>9/9/24</a:t>
+              <a:t>11/1/24</a:t>
             </a:fld>
             <a:endParaRPr lang="en-US"/>
           </a:p>
@@ -2520,7 +2520,7 @@
           <a:p>
             <a:fld id="{1D8BD707-D9CF-40AE-B4C6-C98DA3205C09}" type="datetimeFigureOut">
               <a:rPr lang="en-US"/>
-              <a:t>9/9/24</a:t>
+              <a:t>11/1/24</a:t>
             </a:fld>
             <a:endParaRPr lang="en-US"/>
           </a:p>
@@ -2639,7 +2639,7 @@
           <a:p>
             <a:fld id="{1D8BD707-D9CF-40AE-B4C6-C98DA3205C09}" type="datetimeFigureOut">
               <a:rPr lang="en-US"/>
-              <a:t>9/9/24</a:t>
+              <a:t>11/1/24</a:t>
             </a:fld>
             <a:endParaRPr lang="en-US"/>
           </a:p>
@@ -5340,7 +5340,7 @@
           <a:p>
             <a:fld id="{1D8BD707-D9CF-40AE-B4C6-C98DA3205C09}" type="datetimeFigureOut">
               <a:rPr lang="en-US"/>
-              <a:t>9/9/24</a:t>
+              <a:t>11/1/24</a:t>
             </a:fld>
             <a:endParaRPr lang="en-US"/>
           </a:p>
@@ -14831,7 +14831,7 @@
             </a:br>
             <a:r>
               <a:rPr lang="en-US" sz="1800" dirty="0"/>
-              <a:t>11.09 – </a:t>
+              <a:t>02.11 – </a:t>
             </a:r>
             <a:r>
               <a:rPr lang="ru-RU" sz="1800" dirty="0"/>

--- a/Python/21_NumPy/Presentation/21_Библиотека_Numpy.pptx
+++ b/Python/21_NumPy/Presentation/21_Библиотека_Numpy.pptx
@@ -5,7 +5,7 @@
     <p:sldMasterId id="2147483648" r:id="rId1"/>
   </p:sldMasterIdLst>
   <p:notesMasterIdLst>
-    <p:notesMasterId r:id="rId29"/>
+    <p:notesMasterId r:id="rId27"/>
   </p:notesMasterIdLst>
   <p:sldIdLst>
     <p:sldId id="256" r:id="rId2"/>
@@ -31,10 +31,8 @@
     <p:sldId id="300" r:id="rId22"/>
     <p:sldId id="364" r:id="rId23"/>
     <p:sldId id="281" r:id="rId24"/>
-    <p:sldId id="377" r:id="rId25"/>
-    <p:sldId id="301" r:id="rId26"/>
-    <p:sldId id="302" r:id="rId27"/>
-    <p:sldId id="335" r:id="rId28"/>
+    <p:sldId id="302" r:id="rId25"/>
+    <p:sldId id="335" r:id="rId26"/>
   </p:sldIdLst>
   <p:sldSz cx="9144000" cy="5143500" type="screen16x9"/>
   <p:notesSz cx="9144000" cy="5143500"/>
@@ -234,7 +232,7 @@
           <a:p>
             <a:fld id="{929D4DEE-AA18-4B6A-845C-60AFD9463AA2}" type="datetimeFigureOut">
               <a:rPr lang="ru-RU" smtClean="0"/>
-              <a:t>01.11.2024</a:t>
+              <a:t>05.05.2025</a:t>
             </a:fld>
             <a:endParaRPr lang="ru-RU"/>
           </a:p>
@@ -605,237 +603,6 @@
 </p:notes>
 </file>
 
-<file path=ppt/notesSlides/notesSlide10.xml><?xml version="1.0" encoding="utf-8"?>
-<p:notes xmlns:a="http://schemas.openxmlformats.org/drawingml/2006/main" xmlns:r="http://schemas.openxmlformats.org/officeDocument/2006/relationships" xmlns:p="http://schemas.openxmlformats.org/presentationml/2006/main" showMasterSp="0" showMasterPhAnim="0">
-  <p:cSld>
-    <p:spTree>
-      <p:nvGrpSpPr>
-        <p:cNvPr id="1" name="Shape 490"/>
-        <p:cNvGrpSpPr/>
-        <p:nvPr/>
-      </p:nvGrpSpPr>
-      <p:grpSpPr>
-        <a:xfrm>
-          <a:off x="0" y="0"/>
-          <a:ext cx="0" cy="0"/>
-          <a:chOff x="0" y="0"/>
-          <a:chExt cx="0" cy="0"/>
-        </a:xfrm>
-      </p:grpSpPr>
-      <p:sp>
-        <p:nvSpPr>
-          <p:cNvPr id="491" name="Google Shape;491;p49:notes"/>
-          <p:cNvSpPr>
-            <a:spLocks noGrp="1" noRot="1" noChangeAspect="1"/>
-          </p:cNvSpPr>
-          <p:nvPr>
-            <p:ph type="sldImg" idx="2"/>
-          </p:nvPr>
-        </p:nvSpPr>
-        <p:spPr>
-          <a:xfrm>
-            <a:off x="381000" y="685800"/>
-            <a:ext cx="6096000" cy="3429000"/>
-          </a:xfrm>
-          <a:custGeom>
-            <a:avLst/>
-            <a:gdLst/>
-            <a:ahLst/>
-            <a:cxnLst/>
-            <a:rect l="l" t="t" r="r" b="b"/>
-            <a:pathLst>
-              <a:path w="120000" h="120000" extrusionOk="0">
-                <a:moveTo>
-                  <a:pt x="0" y="0"/>
-                </a:moveTo>
-                <a:lnTo>
-                  <a:pt x="120000" y="0"/>
-                </a:lnTo>
-                <a:lnTo>
-                  <a:pt x="120000" y="120000"/>
-                </a:lnTo>
-                <a:lnTo>
-                  <a:pt x="0" y="120000"/>
-                </a:lnTo>
-                <a:close/>
-              </a:path>
-            </a:pathLst>
-          </a:custGeom>
-          <a:noFill/>
-          <a:ln w="9525" cap="flat" cmpd="sng">
-            <a:solidFill>
-              <a:srgbClr val="000000"/>
-            </a:solidFill>
-            <a:prstDash val="solid"/>
-            <a:round/>
-            <a:headEnd type="none" w="sm" len="sm"/>
-            <a:tailEnd type="none" w="sm" len="sm"/>
-          </a:ln>
-        </p:spPr>
-      </p:sp>
-      <p:sp>
-        <p:nvSpPr>
-          <p:cNvPr id="492" name="Google Shape;492;p49:notes"/>
-          <p:cNvSpPr txBox="1">
-            <a:spLocks noGrp="1"/>
-          </p:cNvSpPr>
-          <p:nvPr>
-            <p:ph type="body" idx="1"/>
-          </p:nvPr>
-        </p:nvSpPr>
-        <p:spPr>
-          <a:xfrm>
-            <a:off x="685800" y="4343400"/>
-            <a:ext cx="5486400" cy="4114800"/>
-          </a:xfrm>
-          <a:prstGeom prst="rect">
-            <a:avLst/>
-          </a:prstGeom>
-          <a:noFill/>
-          <a:ln>
-            <a:noFill/>
-          </a:ln>
-        </p:spPr>
-        <p:txBody>
-          <a:bodyPr spcFirstLastPara="1" wrap="square" lIns="91425" tIns="91425" rIns="91425" bIns="91425" anchor="t" anchorCtr="0">
-            <a:noAutofit/>
-          </a:bodyPr>
-          <a:lstStyle/>
-          <a:p>
-            <a:pPr marL="0" lvl="0" indent="0" algn="l" rtl="0">
-              <a:lnSpc>
-                <a:spcPct val="100000"/>
-              </a:lnSpc>
-              <a:spcBef>
-                <a:spcPts val="0"/>
-              </a:spcBef>
-              <a:spcAft>
-                <a:spcPts val="0"/>
-              </a:spcAft>
-              <a:buSzPts val="1100"/>
-              <a:buNone/>
-            </a:pPr>
-            <a:endParaRPr/>
-          </a:p>
-        </p:txBody>
-      </p:sp>
-    </p:spTree>
-  </p:cSld>
-  <p:clrMapOvr>
-    <a:masterClrMapping/>
-  </p:clrMapOvr>
-</p:notes>
-</file>
-
-<file path=ppt/notesSlides/notesSlide11.xml><?xml version="1.0" encoding="utf-8"?>
-<p:notes xmlns:a="http://schemas.openxmlformats.org/drawingml/2006/main" xmlns:r="http://schemas.openxmlformats.org/officeDocument/2006/relationships" xmlns:p="http://schemas.openxmlformats.org/presentationml/2006/main" showMasterSp="0" showMasterPhAnim="0">
-  <p:cSld>
-    <p:spTree>
-      <p:nvGrpSpPr>
-        <p:cNvPr id="1" name="Shape 200"/>
-        <p:cNvGrpSpPr/>
-        <p:nvPr/>
-      </p:nvGrpSpPr>
-      <p:grpSpPr>
-        <a:xfrm>
-          <a:off x="0" y="0"/>
-          <a:ext cx="0" cy="0"/>
-          <a:chOff x="0" y="0"/>
-          <a:chExt cx="0" cy="0"/>
-        </a:xfrm>
-      </p:grpSpPr>
-      <p:sp>
-        <p:nvSpPr>
-          <p:cNvPr id="201" name="Google Shape;201;gde823becd0_0_40:notes"/>
-          <p:cNvSpPr>
-            <a:spLocks noGrp="1" noRot="1" noChangeAspect="1"/>
-          </p:cNvSpPr>
-          <p:nvPr>
-            <p:ph type="sldImg" idx="2"/>
-          </p:nvPr>
-        </p:nvSpPr>
-        <p:spPr>
-          <a:xfrm>
-            <a:off x="381000" y="685800"/>
-            <a:ext cx="6096000" cy="3429000"/>
-          </a:xfrm>
-          <a:custGeom>
-            <a:avLst/>
-            <a:gdLst/>
-            <a:ahLst/>
-            <a:cxnLst/>
-            <a:rect l="l" t="t" r="r" b="b"/>
-            <a:pathLst>
-              <a:path w="120000" h="120000" extrusionOk="0">
-                <a:moveTo>
-                  <a:pt x="0" y="0"/>
-                </a:moveTo>
-                <a:lnTo>
-                  <a:pt x="120000" y="0"/>
-                </a:lnTo>
-                <a:lnTo>
-                  <a:pt x="120000" y="120000"/>
-                </a:lnTo>
-                <a:lnTo>
-                  <a:pt x="0" y="120000"/>
-                </a:lnTo>
-                <a:close/>
-              </a:path>
-            </a:pathLst>
-          </a:custGeom>
-        </p:spPr>
-      </p:sp>
-      <p:sp>
-        <p:nvSpPr>
-          <p:cNvPr id="202" name="Google Shape;202;gde823becd0_0_40:notes"/>
-          <p:cNvSpPr txBox="1">
-            <a:spLocks noGrp="1"/>
-          </p:cNvSpPr>
-          <p:nvPr>
-            <p:ph type="body" idx="1"/>
-          </p:nvPr>
-        </p:nvSpPr>
-        <p:spPr>
-          <a:xfrm>
-            <a:off x="685800" y="4343400"/>
-            <a:ext cx="5486400" cy="4114800"/>
-          </a:xfrm>
-          <a:prstGeom prst="rect">
-            <a:avLst/>
-          </a:prstGeom>
-        </p:spPr>
-        <p:txBody>
-          <a:bodyPr spcFirstLastPara="1" wrap="square" lIns="91425" tIns="91425" rIns="91425" bIns="91425" anchor="t" anchorCtr="0">
-            <a:noAutofit/>
-          </a:bodyPr>
-          <a:lstStyle/>
-          <a:p>
-            <a:pPr marL="0" lvl="0" indent="0" algn="l" rtl="0">
-              <a:spcBef>
-                <a:spcPts val="0"/>
-              </a:spcBef>
-              <a:spcAft>
-                <a:spcPts val="0"/>
-              </a:spcAft>
-              <a:buNone/>
-            </a:pPr>
-            <a:endParaRPr/>
-          </a:p>
-        </p:txBody>
-      </p:sp>
-    </p:spTree>
-    <p:extLst>
-      <p:ext uri="{BB962C8B-B14F-4D97-AF65-F5344CB8AC3E}">
-        <p14:creationId xmlns:p14="http://schemas.microsoft.com/office/powerpoint/2010/main" val="922118367"/>
-      </p:ext>
-    </p:extLst>
-  </p:cSld>
-  <p:clrMapOvr>
-    <a:masterClrMapping/>
-  </p:clrMapOvr>
-</p:notes>
-</file>
-
 <file path=ppt/notesSlides/notesSlide2.xml><?xml version="1.0" encoding="utf-8"?>
 <p:notes xmlns:a="http://schemas.openxmlformats.org/drawingml/2006/main" xmlns:r="http://schemas.openxmlformats.org/officeDocument/2006/relationships" xmlns:p="http://schemas.openxmlformats.org/presentationml/2006/main" showMasterSp="0" showMasterPhAnim="0">
   <p:cSld>
@@ -1524,7 +1291,7 @@
   <p:cSld>
     <p:spTree>
       <p:nvGrpSpPr>
-        <p:cNvPr id="1" name="Shape 476"/>
+        <p:cNvPr id="1" name="Shape 490"/>
         <p:cNvGrpSpPr/>
         <p:nvPr/>
       </p:nvGrpSpPr>
@@ -1538,7 +1305,7 @@
       </p:grpSpPr>
       <p:sp>
         <p:nvSpPr>
-          <p:cNvPr id="477" name="Google Shape;477;p45:notes"/>
+          <p:cNvPr id="491" name="Google Shape;491;p49:notes"/>
           <p:cNvSpPr>
             <a:spLocks noGrp="1" noRot="1" noChangeAspect="1"/>
           </p:cNvSpPr>
@@ -1589,7 +1356,7 @@
       </p:sp>
       <p:sp>
         <p:nvSpPr>
-          <p:cNvPr id="478" name="Google Shape;478;p45:notes"/>
+          <p:cNvPr id="492" name="Google Shape;492;p49:notes"/>
           <p:cNvSpPr txBox="1">
             <a:spLocks noGrp="1"/>
           </p:cNvSpPr>
@@ -1634,11 +1401,6 @@
         </p:txBody>
       </p:sp>
     </p:spTree>
-    <p:extLst>
-      <p:ext uri="{BB962C8B-B14F-4D97-AF65-F5344CB8AC3E}">
-        <p14:creationId xmlns:p14="http://schemas.microsoft.com/office/powerpoint/2010/main" val="1120305369"/>
-      </p:ext>
-    </p:extLst>
   </p:cSld>
   <p:clrMapOvr>
     <a:masterClrMapping/>
@@ -1651,7 +1413,7 @@
   <p:cSld>
     <p:spTree>
       <p:nvGrpSpPr>
-        <p:cNvPr id="1" name="Shape 481"/>
+        <p:cNvPr id="1" name="Shape 200"/>
         <p:cNvGrpSpPr/>
         <p:nvPr/>
       </p:nvGrpSpPr>
@@ -1665,7 +1427,7 @@
       </p:grpSpPr>
       <p:sp>
         <p:nvSpPr>
-          <p:cNvPr id="482" name="Google Shape;482;p48:notes"/>
+          <p:cNvPr id="201" name="Google Shape;201;gde823becd0_0_40:notes"/>
           <p:cNvSpPr>
             <a:spLocks noGrp="1" noRot="1" noChangeAspect="1"/>
           </p:cNvSpPr>
@@ -1702,21 +1464,11 @@
               </a:path>
             </a:pathLst>
           </a:custGeom>
-          <a:noFill/>
-          <a:ln w="9525" cap="flat" cmpd="sng">
-            <a:solidFill>
-              <a:srgbClr val="000000"/>
-            </a:solidFill>
-            <a:prstDash val="solid"/>
-            <a:round/>
-            <a:headEnd type="none" w="sm" len="sm"/>
-            <a:tailEnd type="none" w="sm" len="sm"/>
-          </a:ln>
         </p:spPr>
       </p:sp>
       <p:sp>
         <p:nvSpPr>
-          <p:cNvPr id="483" name="Google Shape;483;p48:notes"/>
+          <p:cNvPr id="202" name="Google Shape;202;gde823becd0_0_40:notes"/>
           <p:cNvSpPr txBox="1">
             <a:spLocks noGrp="1"/>
           </p:cNvSpPr>
@@ -1732,10 +1484,6 @@
           <a:prstGeom prst="rect">
             <a:avLst/>
           </a:prstGeom>
-          <a:noFill/>
-          <a:ln>
-            <a:noFill/>
-          </a:ln>
         </p:spPr>
         <p:txBody>
           <a:bodyPr spcFirstLastPara="1" wrap="square" lIns="91425" tIns="91425" rIns="91425" bIns="91425" anchor="t" anchorCtr="0">
@@ -1744,16 +1492,12 @@
           <a:lstStyle/>
           <a:p>
             <a:pPr marL="0" lvl="0" indent="0" algn="l" rtl="0">
-              <a:lnSpc>
-                <a:spcPct val="100000"/>
-              </a:lnSpc>
               <a:spcBef>
                 <a:spcPts val="0"/>
               </a:spcBef>
               <a:spcAft>
                 <a:spcPts val="0"/>
               </a:spcAft>
-              <a:buSzPts val="1100"/>
               <a:buNone/>
             </a:pPr>
             <a:endParaRPr/>
@@ -1761,6 +1505,11 @@
         </p:txBody>
       </p:sp>
     </p:spTree>
+    <p:extLst>
+      <p:ext uri="{BB962C8B-B14F-4D97-AF65-F5344CB8AC3E}">
+        <p14:creationId xmlns:p14="http://schemas.microsoft.com/office/powerpoint/2010/main" val="922118367"/>
+      </p:ext>
+    </p:extLst>
   </p:cSld>
   <p:clrMapOvr>
     <a:masterClrMapping/>
@@ -1911,7 +1660,7 @@
           <a:p>
             <a:fld id="{1D8BD707-D9CF-40AE-B4C6-C98DA3205C09}" type="datetimeFigureOut">
               <a:rPr lang="en-US"/>
-              <a:t>11/1/24</a:t>
+              <a:t>5/5/25</a:t>
             </a:fld>
             <a:endParaRPr lang="en-US"/>
           </a:p>
@@ -2086,7 +1835,7 @@
           <a:p>
             <a:fld id="{1D8BD707-D9CF-40AE-B4C6-C98DA3205C09}" type="datetimeFigureOut">
               <a:rPr lang="en-US"/>
-              <a:t>11/1/24</a:t>
+              <a:t>5/5/25</a:t>
             </a:fld>
             <a:endParaRPr lang="en-US"/>
           </a:p>
@@ -2342,7 +2091,7 @@
           <a:p>
             <a:fld id="{1D8BD707-D9CF-40AE-B4C6-C98DA3205C09}" type="datetimeFigureOut">
               <a:rPr lang="en-US"/>
-              <a:t>11/1/24</a:t>
+              <a:t>5/5/25</a:t>
             </a:fld>
             <a:endParaRPr lang="en-US"/>
           </a:p>
@@ -2520,7 +2269,7 @@
           <a:p>
             <a:fld id="{1D8BD707-D9CF-40AE-B4C6-C98DA3205C09}" type="datetimeFigureOut">
               <a:rPr lang="en-US"/>
-              <a:t>11/1/24</a:t>
+              <a:t>5/5/25</a:t>
             </a:fld>
             <a:endParaRPr lang="en-US"/>
           </a:p>
@@ -2639,7 +2388,7 @@
           <a:p>
             <a:fld id="{1D8BD707-D9CF-40AE-B4C6-C98DA3205C09}" type="datetimeFigureOut">
               <a:rPr lang="en-US"/>
-              <a:t>11/1/24</a:t>
+              <a:t>5/5/25</a:t>
             </a:fld>
             <a:endParaRPr lang="en-US"/>
           </a:p>
@@ -5340,7 +5089,7 @@
           <a:p>
             <a:fld id="{1D8BD707-D9CF-40AE-B4C6-C98DA3205C09}" type="datetimeFigureOut">
               <a:rPr lang="en-US"/>
-              <a:t>11/1/24</a:t>
+              <a:t>5/5/25</a:t>
             </a:fld>
             <a:endParaRPr lang="en-US"/>
           </a:p>
@@ -14183,387 +13932,6 @@
   <p:cSld>
     <p:spTree>
       <p:nvGrpSpPr>
-        <p:cNvPr id="1" name="Shape 479"/>
-        <p:cNvGrpSpPr/>
-        <p:nvPr/>
-      </p:nvGrpSpPr>
-      <p:grpSpPr>
-        <a:xfrm>
-          <a:off x="0" y="0"/>
-          <a:ext cx="0" cy="0"/>
-          <a:chOff x="0" y="0"/>
-          <a:chExt cx="0" cy="0"/>
-        </a:xfrm>
-      </p:grpSpPr>
-      <p:sp>
-        <p:nvSpPr>
-          <p:cNvPr id="480" name="Google Shape;480;p74"/>
-          <p:cNvSpPr txBox="1">
-            <a:spLocks noGrp="1"/>
-          </p:cNvSpPr>
-          <p:nvPr>
-            <p:ph type="title"/>
-          </p:nvPr>
-        </p:nvSpPr>
-        <p:spPr>
-          <a:xfrm>
-            <a:off x="651425" y="396394"/>
-            <a:ext cx="7706100" cy="4090800"/>
-          </a:xfrm>
-          <a:prstGeom prst="rect">
-            <a:avLst/>
-          </a:prstGeom>
-          <a:noFill/>
-          <a:ln>
-            <a:noFill/>
-          </a:ln>
-        </p:spPr>
-        <p:txBody>
-          <a:bodyPr spcFirstLastPara="1" wrap="square" lIns="91425" tIns="91425" rIns="91425" bIns="91425" anchor="ctr" anchorCtr="0">
-            <a:noAutofit/>
-          </a:bodyPr>
-          <a:lstStyle/>
-          <a:p>
-            <a:pPr marL="0" lvl="0" indent="0" algn="l" rtl="0">
-              <a:lnSpc>
-                <a:spcPct val="100000"/>
-              </a:lnSpc>
-              <a:spcBef>
-                <a:spcPts val="0"/>
-              </a:spcBef>
-              <a:spcAft>
-                <a:spcPts val="0"/>
-              </a:spcAft>
-              <a:buSzPts val="4600"/>
-              <a:buNone/>
-            </a:pPr>
-            <a:r>
-              <a:rPr lang="ru-RU" dirty="0"/>
-              <a:t>Рефлексия</a:t>
-            </a:r>
-            <a:endParaRPr dirty="0"/>
-          </a:p>
-        </p:txBody>
-      </p:sp>
-    </p:spTree>
-    <p:extLst>
-      <p:ext uri="{BB962C8B-B14F-4D97-AF65-F5344CB8AC3E}">
-        <p14:creationId xmlns:p14="http://schemas.microsoft.com/office/powerpoint/2010/main" val="2157372581"/>
-      </p:ext>
-    </p:extLst>
-  </p:cSld>
-  <p:clrMapOvr>
-    <a:masterClrMapping/>
-  </p:clrMapOvr>
-</p:sld>
-</file>
-
-<file path=ppt/slides/slide25.xml><?xml version="1.0" encoding="utf-8"?>
-<p:sld xmlns:a="http://schemas.openxmlformats.org/drawingml/2006/main" xmlns:r="http://schemas.openxmlformats.org/officeDocument/2006/relationships" xmlns:p="http://schemas.openxmlformats.org/presentationml/2006/main">
-  <p:cSld>
-    <p:spTree>
-      <p:nvGrpSpPr>
-        <p:cNvPr id="1" name="Shape 484"/>
-        <p:cNvGrpSpPr/>
-        <p:nvPr/>
-      </p:nvGrpSpPr>
-      <p:grpSpPr>
-        <a:xfrm>
-          <a:off x="0" y="0"/>
-          <a:ext cx="0" cy="0"/>
-          <a:chOff x="0" y="0"/>
-          <a:chExt cx="0" cy="0"/>
-        </a:xfrm>
-      </p:grpSpPr>
-      <p:sp>
-        <p:nvSpPr>
-          <p:cNvPr id="485" name="Google Shape;485;p75"/>
-          <p:cNvSpPr txBox="1">
-            <a:spLocks noGrp="1"/>
-          </p:cNvSpPr>
-          <p:nvPr>
-            <p:ph type="title"/>
-          </p:nvPr>
-        </p:nvSpPr>
-        <p:spPr>
-          <a:xfrm>
-            <a:off x="500550" y="330724"/>
-            <a:ext cx="8520600" cy="1095900"/>
-          </a:xfrm>
-          <a:prstGeom prst="rect">
-            <a:avLst/>
-          </a:prstGeom>
-          <a:noFill/>
-          <a:ln>
-            <a:noFill/>
-          </a:ln>
-        </p:spPr>
-        <p:txBody>
-          <a:bodyPr spcFirstLastPara="1" wrap="square" lIns="91425" tIns="91425" rIns="91425" bIns="91425" anchor="t" anchorCtr="0">
-            <a:noAutofit/>
-          </a:bodyPr>
-          <a:lstStyle/>
-          <a:p>
-            <a:pPr marL="0" lvl="0" indent="0" algn="l" rtl="0">
-              <a:lnSpc>
-                <a:spcPct val="100000"/>
-              </a:lnSpc>
-              <a:spcBef>
-                <a:spcPts val="0"/>
-              </a:spcBef>
-              <a:spcAft>
-                <a:spcPts val="0"/>
-              </a:spcAft>
-              <a:buSzPts val="3100"/>
-              <a:buNone/>
-            </a:pPr>
-            <a:r>
-              <a:rPr lang="ru-RU" dirty="0"/>
-              <a:t>Рефлексия</a:t>
-            </a:r>
-            <a:endParaRPr dirty="0"/>
-          </a:p>
-        </p:txBody>
-      </p:sp>
-      <p:pic>
-        <p:nvPicPr>
-          <p:cNvPr id="486" name="Google Shape;486;p75"/>
-          <p:cNvPicPr preferRelativeResize="0"/>
-          <p:nvPr/>
-        </p:nvPicPr>
-        <p:blipFill rotWithShape="1">
-          <a:blip r:embed="rId3">
-            <a:alphaModFix/>
-          </a:blip>
-          <a:srcRect/>
-          <a:stretch/>
-        </p:blipFill>
-        <p:spPr>
-          <a:xfrm>
-            <a:off x="633114" y="2019850"/>
-            <a:ext cx="828522" cy="828504"/>
-          </a:xfrm>
-          <a:prstGeom prst="rect">
-            <a:avLst/>
-          </a:prstGeom>
-          <a:noFill/>
-          <a:ln>
-            <a:noFill/>
-          </a:ln>
-        </p:spPr>
-      </p:pic>
-      <p:sp>
-        <p:nvSpPr>
-          <p:cNvPr id="487" name="Google Shape;487;p75"/>
-          <p:cNvSpPr txBox="1"/>
-          <p:nvPr/>
-        </p:nvSpPr>
-        <p:spPr>
-          <a:xfrm>
-            <a:off x="1700240" y="2364004"/>
-            <a:ext cx="4672200" cy="415500"/>
-          </a:xfrm>
-          <a:prstGeom prst="rect">
-            <a:avLst/>
-          </a:prstGeom>
-          <a:noFill/>
-          <a:ln>
-            <a:noFill/>
-          </a:ln>
-        </p:spPr>
-        <p:txBody>
-          <a:bodyPr spcFirstLastPara="1" wrap="square" lIns="91425" tIns="91425" rIns="91425" bIns="91425" anchor="t" anchorCtr="0">
-            <a:spAutoFit/>
-          </a:bodyPr>
-          <a:lstStyle/>
-          <a:p>
-            <a:pPr marL="0" marR="0" lvl="0" indent="0" algn="l" rtl="0">
-              <a:lnSpc>
-                <a:spcPct val="100000"/>
-              </a:lnSpc>
-              <a:spcBef>
-                <a:spcPts val="0"/>
-              </a:spcBef>
-              <a:spcAft>
-                <a:spcPts val="0"/>
-              </a:spcAft>
-              <a:buClr>
-                <a:srgbClr val="000000"/>
-              </a:buClr>
-              <a:buSzPts val="1500"/>
-              <a:buFont typeface="Arial"/>
-              <a:buNone/>
-            </a:pPr>
-            <a:r>
-              <a:rPr lang="ru-RU" sz="1500" b="0" i="0" u="none" strike="noStrike" cap="none">
-                <a:solidFill>
-                  <a:schemeClr val="dk1"/>
-                </a:solidFill>
-                <a:latin typeface="Roboto"/>
-                <a:ea typeface="Roboto"/>
-                <a:cs typeface="Roboto"/>
-                <a:sym typeface="Roboto"/>
-              </a:rPr>
-              <a:t>С какими впечатлениями уходите с вебинара?</a:t>
-            </a:r>
-            <a:endParaRPr sz="1500" b="0" i="0" u="none" strike="noStrike" cap="none">
-              <a:solidFill>
-                <a:schemeClr val="dk1"/>
-              </a:solidFill>
-              <a:latin typeface="Roboto"/>
-              <a:ea typeface="Roboto"/>
-              <a:cs typeface="Roboto"/>
-              <a:sym typeface="Roboto"/>
-            </a:endParaRPr>
-          </a:p>
-        </p:txBody>
-      </p:sp>
-      <p:sp>
-        <p:nvSpPr>
-          <p:cNvPr id="488" name="Google Shape;488;p75"/>
-          <p:cNvSpPr txBox="1"/>
-          <p:nvPr/>
-        </p:nvSpPr>
-        <p:spPr>
-          <a:xfrm>
-            <a:off x="1700240" y="3414189"/>
-            <a:ext cx="4996800" cy="646500"/>
-          </a:xfrm>
-          <a:prstGeom prst="rect">
-            <a:avLst/>
-          </a:prstGeom>
-          <a:noFill/>
-          <a:ln>
-            <a:noFill/>
-          </a:ln>
-        </p:spPr>
-        <p:txBody>
-          <a:bodyPr spcFirstLastPara="1" wrap="square" lIns="91425" tIns="91425" rIns="91425" bIns="91425" anchor="t" anchorCtr="0">
-            <a:spAutoFit/>
-          </a:bodyPr>
-          <a:lstStyle/>
-          <a:p>
-            <a:pPr marL="0" marR="0" lvl="0" indent="0" algn="l" rtl="0">
-              <a:lnSpc>
-                <a:spcPct val="100000"/>
-              </a:lnSpc>
-              <a:spcBef>
-                <a:spcPts val="0"/>
-              </a:spcBef>
-              <a:spcAft>
-                <a:spcPts val="0"/>
-              </a:spcAft>
-              <a:buClr>
-                <a:srgbClr val="000000"/>
-              </a:buClr>
-              <a:buSzPts val="1500"/>
-              <a:buFont typeface="Arial"/>
-              <a:buNone/>
-            </a:pPr>
-            <a:r>
-              <a:rPr lang="ru-RU" sz="1500" b="0" i="0" u="none" strike="noStrike" cap="none">
-                <a:solidFill>
-                  <a:schemeClr val="dk1"/>
-                </a:solidFill>
-                <a:latin typeface="Roboto"/>
-                <a:ea typeface="Roboto"/>
-                <a:cs typeface="Roboto"/>
-                <a:sym typeface="Roboto"/>
-              </a:rPr>
-              <a:t>Как будете применять на практике то,</a:t>
-            </a:r>
-            <a:endParaRPr sz="1500" b="0" i="0" u="none" strike="noStrike" cap="none">
-              <a:solidFill>
-                <a:schemeClr val="dk1"/>
-              </a:solidFill>
-              <a:latin typeface="Roboto"/>
-              <a:ea typeface="Roboto"/>
-              <a:cs typeface="Roboto"/>
-              <a:sym typeface="Roboto"/>
-            </a:endParaRPr>
-          </a:p>
-          <a:p>
-            <a:pPr marL="0" marR="0" lvl="0" indent="0" algn="l" rtl="0">
-              <a:lnSpc>
-                <a:spcPct val="100000"/>
-              </a:lnSpc>
-              <a:spcBef>
-                <a:spcPts val="0"/>
-              </a:spcBef>
-              <a:spcAft>
-                <a:spcPts val="0"/>
-              </a:spcAft>
-              <a:buClr>
-                <a:srgbClr val="000000"/>
-              </a:buClr>
-              <a:buSzPts val="1500"/>
-              <a:buFont typeface="Arial"/>
-              <a:buNone/>
-            </a:pPr>
-            <a:r>
-              <a:rPr lang="ru-RU" sz="1500" b="0" i="0" u="none" strike="noStrike" cap="none">
-                <a:solidFill>
-                  <a:schemeClr val="dk1"/>
-                </a:solidFill>
-                <a:latin typeface="Roboto"/>
-                <a:ea typeface="Roboto"/>
-                <a:cs typeface="Roboto"/>
-                <a:sym typeface="Roboto"/>
-              </a:rPr>
-              <a:t>что узнали на вебинаре?</a:t>
-            </a:r>
-            <a:endParaRPr sz="1500" b="0" i="0" u="none" strike="noStrike" cap="none">
-              <a:solidFill>
-                <a:schemeClr val="dk1"/>
-              </a:solidFill>
-              <a:latin typeface="Roboto"/>
-              <a:ea typeface="Roboto"/>
-              <a:cs typeface="Roboto"/>
-              <a:sym typeface="Roboto"/>
-            </a:endParaRPr>
-          </a:p>
-        </p:txBody>
-      </p:sp>
-      <p:pic>
-        <p:nvPicPr>
-          <p:cNvPr id="489" name="Google Shape;489;p75"/>
-          <p:cNvPicPr preferRelativeResize="0"/>
-          <p:nvPr/>
-        </p:nvPicPr>
-        <p:blipFill rotWithShape="1">
-          <a:blip r:embed="rId4">
-            <a:alphaModFix/>
-          </a:blip>
-          <a:srcRect/>
-          <a:stretch/>
-        </p:blipFill>
-        <p:spPr>
-          <a:xfrm>
-            <a:off x="621950" y="3330152"/>
-            <a:ext cx="845250" cy="845249"/>
-          </a:xfrm>
-          <a:prstGeom prst="rect">
-            <a:avLst/>
-          </a:prstGeom>
-          <a:noFill/>
-          <a:ln>
-            <a:noFill/>
-          </a:ln>
-        </p:spPr>
-      </p:pic>
-    </p:spTree>
-  </p:cSld>
-  <p:clrMapOvr>
-    <a:masterClrMapping/>
-  </p:clrMapOvr>
-</p:sld>
-</file>
-
-<file path=ppt/slides/slide26.xml><?xml version="1.0" encoding="utf-8"?>
-<p:sld xmlns:a="http://schemas.openxmlformats.org/drawingml/2006/main" xmlns:r="http://schemas.openxmlformats.org/officeDocument/2006/relationships" xmlns:p="http://schemas.openxmlformats.org/presentationml/2006/main">
-  <p:cSld>
-    <p:spTree>
-      <p:nvGrpSpPr>
         <p:cNvPr id="1" name="Shape 493"/>
         <p:cNvGrpSpPr/>
         <p:nvPr/>
@@ -14678,7 +14046,7 @@
 </p:sld>
 </file>
 
-<file path=ppt/slides/slide27.xml><?xml version="1.0" encoding="utf-8"?>
+<file path=ppt/slides/slide25.xml><?xml version="1.0" encoding="utf-8"?>
 <p:sld xmlns:a="http://schemas.openxmlformats.org/drawingml/2006/main" xmlns:r="http://schemas.openxmlformats.org/officeDocument/2006/relationships" xmlns:p="http://schemas.openxmlformats.org/presentationml/2006/main">
   <p:cSld>
     <p:spTree>
@@ -14813,9 +14181,6 @@
           <a:lstStyle/>
           <a:p>
             <a:pPr marL="0" lvl="0" indent="0" algn="l" rtl="0">
-              <a:lnSpc>
-                <a:spcPct val="150000"/>
-              </a:lnSpc>
               <a:spcAft>
                 <a:spcPts val="0"/>
               </a:spcAft>
@@ -14830,16 +14195,19 @@
               <a:rPr lang="ru-RU" dirty="0"/>
             </a:br>
             <a:r>
-              <a:rPr lang="en-US" sz="1800" dirty="0"/>
-              <a:t>02.11 – </a:t>
-            </a:r>
-            <a:r>
               <a:rPr lang="ru-RU" sz="1800" dirty="0"/>
               <a:t>Библиотека </a:t>
             </a:r>
             <a:r>
               <a:rPr lang="en-US" sz="1800" dirty="0"/>
-              <a:t>Pandas, Series </a:t>
+              <a:t>Pandas</a:t>
+            </a:r>
+            <a:br>
+              <a:rPr lang="ru-RU" sz="1800" dirty="0"/>
+            </a:br>
+            <a:r>
+              <a:rPr lang="en-US" sz="1800" dirty="0"/>
+              <a:t>Series </a:t>
             </a:r>
             <a:r>
               <a:rPr lang="ru-RU" sz="1800" dirty="0"/>
